--- a/SmartParkingppt.pptx
+++ b/SmartParkingppt.pptx
@@ -5654,15 +5654,13 @@
               <a:buNone/>
             </a:pPr>
             <a:r>
-              <a:rPr lang="en-US" sz="2200" b="1" dirty="0">
+              <a:rPr sz="2200" b="1">
                 <a:solidFill>
                   <a:srgbClr val="0096CC"/>
                 </a:solidFill>
-                <a:latin typeface="Arial" panose="020B0604020202020204" pitchFamily="34" charset="0"/>
-                <a:ea typeface="Arial" panose="020B0604020202020204" pitchFamily="34" charset="-122"/>
-                <a:cs typeface="Arial" panose="020B0604020202020204" pitchFamily="34" charset="-120"/>
-              </a:rPr>
-              <a:t>Drawbacks:</a:t>
+                <a:latin typeface="Arial"/>
+              </a:rPr>
+              <a:t>Future Enhancement:</a:t>
             </a:r>
             <a:endParaRPr lang="en-US" sz="2200" dirty="0"/>
           </a:p>
@@ -5688,88 +5686,78 @@
           <a:bodyPr wrap="square" rtlCol="0" anchor="ctr"/>
           <a:lstStyle/>
           <a:p>
-            <a:pPr marL="342900" indent="-342900">
+            <a:pPr marL="285750" indent="-285750">
               <a:spcAft>
                 <a:spcPts val="300"/>
               </a:spcAft>
               <a:buSzPct val="100000"/>
+              <a:buFont typeface="Arial" panose="020B0604020202020204" pitchFamily="34" charset="0"/>
               <a:buChar char="•"/>
             </a:pPr>
             <a:r>
-              <a:rPr lang="en-US" sz="1250" dirty="0">
-                <a:solidFill>
-                  <a:srgbClr val="333333"/>
-                </a:solidFill>
-                <a:latin typeface="Arial" panose="020B0604020202020204" pitchFamily="34" charset="0"/>
-                <a:ea typeface="Arial" panose="020B0604020202020204" pitchFamily="34" charset="-122"/>
-                <a:cs typeface="Arial" panose="020B0604020202020204" pitchFamily="34" charset="-120"/>
-              </a:rPr>
-              <a:t>Higher infrastructure resource consumption due to Docker and Kubernetes overhead.</a:t>
+              <a:rPr sz="1250" b="0" dirty="0">
+                <a:solidFill>
+                  <a:srgbClr val="333333"/>
+                </a:solidFill>
+                <a:latin typeface="Arial"/>
+              </a:rPr>
+              <a:t>Integration with IoT sensors and RFID technology for automated entry and exit gate control.</a:t>
             </a:r>
             <a:endParaRPr lang="en-US" sz="1250" dirty="0"/>
           </a:p>
           <a:p>
-            <a:pPr marL="342900" indent="-342900">
-              <a:spcAft>
-                <a:spcPts val="300"/>
-              </a:spcAft>
-              <a:buSzPct val="100000"/>
+            <a:pPr marL="285750" indent="-285750">
+              <a:lnSpc>
+                <a:spcPct val="150000"/>
+              </a:lnSpc>
+              <a:buFont typeface="Arial" panose="020B0604020202020204" pitchFamily="34" charset="0"/>
               <a:buChar char="•"/>
             </a:pPr>
             <a:r>
-              <a:rPr lang="en-US" sz="1250" dirty="0">
-                <a:solidFill>
-                  <a:srgbClr val="333333"/>
-                </a:solidFill>
-                <a:latin typeface="Arial" panose="020B0604020202020204" pitchFamily="34" charset="0"/>
-                <a:ea typeface="Arial" panose="020B0604020202020204" pitchFamily="34" charset="-122"/>
-                <a:cs typeface="Arial" panose="020B0604020202020204" pitchFamily="34" charset="-120"/>
-              </a:rPr>
-              <a:t>Requires ongoing maintenance and periodic updates to remain secure and stable.</a:t>
-            </a:r>
-            <a:endParaRPr lang="en-US" sz="1250" dirty="0"/>
-          </a:p>
-          <a:p>
-            <a:pPr marL="342900" indent="-342900">
-              <a:spcAft>
-                <a:spcPts val="300"/>
-              </a:spcAft>
-              <a:buSzPct val="100000"/>
+              <a:rPr sz="1250" b="0" dirty="0">
+                <a:solidFill>
+                  <a:srgbClr val="333333"/>
+                </a:solidFill>
+                <a:latin typeface="Arial"/>
+              </a:rPr>
+              <a:t>Implementation of database clustering and replication for high availability and fault tolerance.</a:t>
+            </a:r>
+          </a:p>
+          <a:p>
+            <a:pPr marL="285750" indent="-285750">
+              <a:lnSpc>
+                <a:spcPct val="150000"/>
+              </a:lnSpc>
+              <a:buFont typeface="Arial" panose="020B0604020202020204" pitchFamily="34" charset="0"/>
               <a:buChar char="•"/>
             </a:pPr>
             <a:r>
-              <a:rPr lang="en-US" sz="1250" dirty="0">
-                <a:solidFill>
-                  <a:srgbClr val="333333"/>
-                </a:solidFill>
-                <a:latin typeface="Arial" panose="020B0604020202020204" pitchFamily="34" charset="0"/>
-                <a:ea typeface="Arial" panose="020B0604020202020204" pitchFamily="34" charset="-122"/>
-                <a:cs typeface="Arial" panose="020B0604020202020204" pitchFamily="34" charset="-120"/>
-              </a:rPr>
-              <a:t>No IoT or RFID integration is available in the current version.</a:t>
-            </a:r>
-            <a:endParaRPr lang="en-US" sz="1250" dirty="0"/>
-          </a:p>
-          <a:p>
-            <a:pPr marL="342900" indent="-342900">
-              <a:spcAft>
-                <a:spcPts val="300"/>
-              </a:spcAft>
-              <a:buSzPct val="100000"/>
+              <a:rPr sz="1250" b="0" dirty="0">
+                <a:solidFill>
+                  <a:srgbClr val="333333"/>
+                </a:solidFill>
+                <a:latin typeface="Arial"/>
+              </a:rPr>
+              <a:t>Optimization of container resources to reduce cloud infrastructure overhead.</a:t>
+            </a:r>
+          </a:p>
+          <a:p>
+            <a:pPr marL="285750" indent="-285750">
+              <a:lnSpc>
+                <a:spcPct val="150000"/>
+              </a:lnSpc>
+              <a:buFont typeface="Arial" panose="020B0604020202020204" pitchFamily="34" charset="0"/>
               <a:buChar char="•"/>
             </a:pPr>
             <a:r>
-              <a:rPr lang="en-US" sz="1250" dirty="0">
-                <a:solidFill>
-                  <a:srgbClr val="333333"/>
-                </a:solidFill>
-                <a:latin typeface="Arial" panose="020B0604020202020204" pitchFamily="34" charset="0"/>
-                <a:ea typeface="Arial" panose="020B0604020202020204" pitchFamily="34" charset="-122"/>
-                <a:cs typeface="Arial" panose="020B0604020202020204" pitchFamily="34" charset="-120"/>
-              </a:rPr>
-              <a:t>The database remains a single point of failure within the current project deployment configuration.</a:t>
-            </a:r>
-            <a:endParaRPr lang="en-US" sz="1250" dirty="0"/>
+              <a:rPr sz="1250" b="0" dirty="0">
+                <a:solidFill>
+                  <a:srgbClr val="333333"/>
+                </a:solidFill>
+                <a:latin typeface="Arial"/>
+              </a:rPr>
+              <a:t>Addition of predictive analytics for parking demand forecasting and dynamic pricing.</a:t>
+            </a:r>
           </a:p>
         </p:txBody>
       </p:sp>
